--- a/content/blog/outliers/Para_capa.pptx
+++ b/content/blog/outliers/Para_capa.pptx
@@ -104,6 +104,11 @@
       </a:defRPr>
     </a:lvl9pPr>
   </p:defaultTextStyle>
+  <p:extLst>
+    <p:ext uri="{EFAFB233-063F-42B5-8137-9DF3F51BA10A}">
+      <p15:sldGuideLst xmlns:p15="http://schemas.microsoft.com/office/powerpoint/2012/main"/>
+    </p:ext>
+  </p:extLst>
 </p:presentation>
 </file>
 
@@ -3321,114 +3326,31 @@
           <a:chExt cx="0" cy="0"/>
         </a:xfrm>
       </p:grpSpPr>
-      <p:pic>
-        <p:nvPicPr>
-          <p:cNvPr id="5" name="Imagem 4">
-            <a:extLst>
-              <a:ext uri="{FF2B5EF4-FFF2-40B4-BE49-F238E27FC236}">
-                <a16:creationId xmlns:a16="http://schemas.microsoft.com/office/drawing/2014/main" id="{43E7EA07-A0B8-2CB4-6A15-30D4FE5E9FDD}"/>
-              </a:ext>
-            </a:extLst>
-          </p:cNvPr>
-          <p:cNvPicPr>
-            <a:picLocks noChangeAspect="1"/>
-          </p:cNvPicPr>
+      <p:sp>
+        <p:nvSpPr>
+          <p:cNvPr id="2" name="Retângulo 1">
+            <a:extLst>
+              <a:ext uri="{FF2B5EF4-FFF2-40B4-BE49-F238E27FC236}">
+                <a16:creationId xmlns:a16="http://schemas.microsoft.com/office/drawing/2014/main" id="{92671B8F-D592-3740-03AC-880B1C0FED8E}"/>
+              </a:ext>
+            </a:extLst>
+          </p:cNvPr>
+          <p:cNvSpPr/>
           <p:nvPr/>
-        </p:nvPicPr>
-        <p:blipFill>
-          <a:blip r:embed="rId2"/>
-          <a:stretch>
-            <a:fillRect/>
-          </a:stretch>
-        </p:blipFill>
+        </p:nvSpPr>
         <p:spPr>
           <a:xfrm>
-            <a:off x="3574366" y="656431"/>
-            <a:ext cx="4620948" cy="5545138"/>
+            <a:off x="1024128" y="326136"/>
+            <a:ext cx="10143744" cy="6205728"/>
           </a:xfrm>
           <a:prstGeom prst="rect">
             <a:avLst/>
           </a:prstGeom>
-        </p:spPr>
-      </p:pic>
-      <p:sp>
-        <p:nvSpPr>
-          <p:cNvPr id="6" name="Forma Livre 5">
-            <a:extLst>
-              <a:ext uri="{FF2B5EF4-FFF2-40B4-BE49-F238E27FC236}">
-                <a16:creationId xmlns:a16="http://schemas.microsoft.com/office/drawing/2014/main" id="{D2BA2287-5390-3392-6FDD-F524A7FA9A75}"/>
-              </a:ext>
-            </a:extLst>
-          </p:cNvPr>
-          <p:cNvSpPr/>
-          <p:nvPr/>
-        </p:nvSpPr>
-        <p:spPr>
-          <a:xfrm>
-            <a:off x="6414868" y="877103"/>
-            <a:ext cx="506437" cy="429407"/>
-          </a:xfrm>
-          <a:custGeom>
-            <a:avLst/>
-            <a:gdLst>
-              <a:gd name="csX0" fmla="*/ 0 w 506437"/>
-              <a:gd name="csY0" fmla="*/ 163906 h 429407"/>
-              <a:gd name="csX1" fmla="*/ 253218 w 506437"/>
-              <a:gd name="csY1" fmla="*/ 9162 h 429407"/>
-              <a:gd name="csX2" fmla="*/ 295421 w 506437"/>
-              <a:gd name="csY2" fmla="*/ 403057 h 429407"/>
-              <a:gd name="csX3" fmla="*/ 506437 w 506437"/>
-              <a:gd name="csY3" fmla="*/ 360854 h 429407"/>
-            </a:gdLst>
-            <a:ahLst/>
-            <a:cxnLst>
-              <a:cxn ang="0">
-                <a:pos x="csX0" y="csY0"/>
-              </a:cxn>
-              <a:cxn ang="0">
-                <a:pos x="csX1" y="csY1"/>
-              </a:cxn>
-              <a:cxn ang="0">
-                <a:pos x="csX2" y="csY2"/>
-              </a:cxn>
-              <a:cxn ang="0">
-                <a:pos x="csX3" y="csY3"/>
-              </a:cxn>
-            </a:cxnLst>
-            <a:rect l="l" t="t" r="r" b="b"/>
-            <a:pathLst>
-              <a:path w="506437" h="429407">
-                <a:moveTo>
-                  <a:pt x="0" y="163906"/>
-                </a:moveTo>
-                <a:cubicBezTo>
-                  <a:pt x="101990" y="66604"/>
-                  <a:pt x="203981" y="-30697"/>
-                  <a:pt x="253218" y="9162"/>
-                </a:cubicBezTo>
-                <a:cubicBezTo>
-                  <a:pt x="302455" y="49020"/>
-                  <a:pt x="253218" y="344442"/>
-                  <a:pt x="295421" y="403057"/>
-                </a:cubicBezTo>
-                <a:cubicBezTo>
-                  <a:pt x="337624" y="461672"/>
-                  <a:pt x="422030" y="411263"/>
-                  <a:pt x="506437" y="360854"/>
-                </a:cubicBezTo>
-              </a:path>
-            </a:pathLst>
-          </a:custGeom>
-          <a:noFill/>
+          <a:solidFill>
+            <a:schemeClr val="bg1"/>
+          </a:solidFill>
           <a:ln>
-            <a:solidFill>
-              <a:schemeClr val="tx1">
-                <a:lumMod val="50000"/>
-                <a:lumOff val="50000"/>
-              </a:schemeClr>
-            </a:solidFill>
-            <a:headEnd type="none" w="med" len="med"/>
-            <a:tailEnd type="triangle" w="med" len="med"/>
+            <a:noFill/>
           </a:ln>
         </p:spPr>
         <p:style>
@@ -3456,49 +3378,205 @@
           </a:p>
         </p:txBody>
       </p:sp>
-      <p:sp>
-        <p:nvSpPr>
-          <p:cNvPr id="7" name="CaixaDeTexto 6">
-            <a:extLst>
-              <a:ext uri="{FF2B5EF4-FFF2-40B4-BE49-F238E27FC236}">
-                <a16:creationId xmlns:a16="http://schemas.microsoft.com/office/drawing/2014/main" id="{EF4F0646-310E-DBD4-AC77-8B219E4BEC26}"/>
-              </a:ext>
-            </a:extLst>
-          </p:cNvPr>
-          <p:cNvSpPr txBox="1"/>
+      <p:grpSp>
+        <p:nvGrpSpPr>
+          <p:cNvPr id="3" name="Agrupar 2">
+            <a:extLst>
+              <a:ext uri="{FF2B5EF4-FFF2-40B4-BE49-F238E27FC236}">
+                <a16:creationId xmlns:a16="http://schemas.microsoft.com/office/drawing/2014/main" id="{E3E53212-5895-C293-7621-102890E0DC72}"/>
+              </a:ext>
+            </a:extLst>
+          </p:cNvPr>
+          <p:cNvGrpSpPr/>
           <p:nvPr/>
-        </p:nvSpPr>
-        <p:spPr>
+        </p:nvGrpSpPr>
+        <p:grpSpPr>
           <a:xfrm>
-            <a:off x="6893169" y="1091806"/>
-            <a:ext cx="864339" cy="369332"/>
+            <a:off x="3785526" y="656431"/>
+            <a:ext cx="4620948" cy="5545138"/>
+            <a:chOff x="3574366" y="656431"/>
+            <a:chExt cx="4620948" cy="5545138"/>
           </a:xfrm>
-          <a:prstGeom prst="rect">
-            <a:avLst/>
-          </a:prstGeom>
-          <a:noFill/>
-        </p:spPr>
-        <p:txBody>
-          <a:bodyPr wrap="none" rtlCol="0">
-            <a:spAutoFit/>
-          </a:bodyPr>
-          <a:lstStyle/>
-          <a:p>
-            <a:r>
-              <a:rPr lang="pt-BR" b="1" i="1" dirty="0">
-                <a:solidFill>
-                  <a:schemeClr val="tx1">
-                    <a:lumMod val="50000"/>
-                    <a:lumOff val="50000"/>
-                  </a:schemeClr>
-                </a:solidFill>
-                <a:latin typeface="Nunito" pitchFamily="2" charset="77"/>
-              </a:rPr>
-              <a:t>outlier</a:t>
-            </a:r>
-          </a:p>
-        </p:txBody>
-      </p:sp>
+        </p:grpSpPr>
+        <p:pic>
+          <p:nvPicPr>
+            <p:cNvPr id="5" name="Imagem 4">
+              <a:extLst>
+                <a:ext uri="{FF2B5EF4-FFF2-40B4-BE49-F238E27FC236}">
+                  <a16:creationId xmlns:a16="http://schemas.microsoft.com/office/drawing/2014/main" id="{43E7EA07-A0B8-2CB4-6A15-30D4FE5E9FDD}"/>
+                </a:ext>
+              </a:extLst>
+            </p:cNvPr>
+            <p:cNvPicPr>
+              <a:picLocks noChangeAspect="1"/>
+            </p:cNvPicPr>
+            <p:nvPr/>
+          </p:nvPicPr>
+          <p:blipFill>
+            <a:blip r:embed="rId2"/>
+            <a:stretch>
+              <a:fillRect/>
+            </a:stretch>
+          </p:blipFill>
+          <p:spPr>
+            <a:xfrm>
+              <a:off x="3574366" y="656431"/>
+              <a:ext cx="4620948" cy="5545138"/>
+            </a:xfrm>
+            <a:prstGeom prst="rect">
+              <a:avLst/>
+            </a:prstGeom>
+          </p:spPr>
+        </p:pic>
+        <p:sp>
+          <p:nvSpPr>
+            <p:cNvPr id="6" name="Forma Livre 5">
+              <a:extLst>
+                <a:ext uri="{FF2B5EF4-FFF2-40B4-BE49-F238E27FC236}">
+                  <a16:creationId xmlns:a16="http://schemas.microsoft.com/office/drawing/2014/main" id="{D2BA2287-5390-3392-6FDD-F524A7FA9A75}"/>
+                </a:ext>
+              </a:extLst>
+            </p:cNvPr>
+            <p:cNvSpPr/>
+            <p:nvPr/>
+          </p:nvSpPr>
+          <p:spPr>
+            <a:xfrm>
+              <a:off x="6414868" y="877103"/>
+              <a:ext cx="506437" cy="429407"/>
+            </a:xfrm>
+            <a:custGeom>
+              <a:avLst/>
+              <a:gdLst>
+                <a:gd name="csX0" fmla="*/ 0 w 506437"/>
+                <a:gd name="csY0" fmla="*/ 163906 h 429407"/>
+                <a:gd name="csX1" fmla="*/ 253218 w 506437"/>
+                <a:gd name="csY1" fmla="*/ 9162 h 429407"/>
+                <a:gd name="csX2" fmla="*/ 295421 w 506437"/>
+                <a:gd name="csY2" fmla="*/ 403057 h 429407"/>
+                <a:gd name="csX3" fmla="*/ 506437 w 506437"/>
+                <a:gd name="csY3" fmla="*/ 360854 h 429407"/>
+              </a:gdLst>
+              <a:ahLst/>
+              <a:cxnLst>
+                <a:cxn ang="0">
+                  <a:pos x="csX0" y="csY0"/>
+                </a:cxn>
+                <a:cxn ang="0">
+                  <a:pos x="csX1" y="csY1"/>
+                </a:cxn>
+                <a:cxn ang="0">
+                  <a:pos x="csX2" y="csY2"/>
+                </a:cxn>
+                <a:cxn ang="0">
+                  <a:pos x="csX3" y="csY3"/>
+                </a:cxn>
+              </a:cxnLst>
+              <a:rect l="l" t="t" r="r" b="b"/>
+              <a:pathLst>
+                <a:path w="506437" h="429407">
+                  <a:moveTo>
+                    <a:pt x="0" y="163906"/>
+                  </a:moveTo>
+                  <a:cubicBezTo>
+                    <a:pt x="101990" y="66604"/>
+                    <a:pt x="203981" y="-30697"/>
+                    <a:pt x="253218" y="9162"/>
+                  </a:cubicBezTo>
+                  <a:cubicBezTo>
+                    <a:pt x="302455" y="49020"/>
+                    <a:pt x="253218" y="344442"/>
+                    <a:pt x="295421" y="403057"/>
+                  </a:cubicBezTo>
+                  <a:cubicBezTo>
+                    <a:pt x="337624" y="461672"/>
+                    <a:pt x="422030" y="411263"/>
+                    <a:pt x="506437" y="360854"/>
+                  </a:cubicBezTo>
+                </a:path>
+              </a:pathLst>
+            </a:custGeom>
+            <a:noFill/>
+            <a:ln>
+              <a:solidFill>
+                <a:schemeClr val="tx1">
+                  <a:lumMod val="50000"/>
+                  <a:lumOff val="50000"/>
+                </a:schemeClr>
+              </a:solidFill>
+              <a:headEnd type="none" w="med" len="med"/>
+              <a:tailEnd type="triangle" w="med" len="med"/>
+            </a:ln>
+          </p:spPr>
+          <p:style>
+            <a:lnRef idx="2">
+              <a:schemeClr val="accent1">
+                <a:shade val="15000"/>
+              </a:schemeClr>
+            </a:lnRef>
+            <a:fillRef idx="1">
+              <a:schemeClr val="accent1"/>
+            </a:fillRef>
+            <a:effectRef idx="0">
+              <a:schemeClr val="accent1"/>
+            </a:effectRef>
+            <a:fontRef idx="minor">
+              <a:schemeClr val="lt1"/>
+            </a:fontRef>
+          </p:style>
+          <p:txBody>
+            <a:bodyPr rtlCol="0" anchor="ctr"/>
+            <a:lstStyle/>
+            <a:p>
+              <a:pPr algn="ctr"/>
+              <a:endParaRPr lang="pt-BR"/>
+            </a:p>
+          </p:txBody>
+        </p:sp>
+        <p:sp>
+          <p:nvSpPr>
+            <p:cNvPr id="7" name="CaixaDeTexto 6">
+              <a:extLst>
+                <a:ext uri="{FF2B5EF4-FFF2-40B4-BE49-F238E27FC236}">
+                  <a16:creationId xmlns:a16="http://schemas.microsoft.com/office/drawing/2014/main" id="{EF4F0646-310E-DBD4-AC77-8B219E4BEC26}"/>
+                </a:ext>
+              </a:extLst>
+            </p:cNvPr>
+            <p:cNvSpPr txBox="1"/>
+            <p:nvPr/>
+          </p:nvSpPr>
+          <p:spPr>
+            <a:xfrm>
+              <a:off x="6893169" y="1091806"/>
+              <a:ext cx="864339" cy="369332"/>
+            </a:xfrm>
+            <a:prstGeom prst="rect">
+              <a:avLst/>
+            </a:prstGeom>
+            <a:noFill/>
+          </p:spPr>
+          <p:txBody>
+            <a:bodyPr wrap="none" rtlCol="0">
+              <a:spAutoFit/>
+            </a:bodyPr>
+            <a:lstStyle/>
+            <a:p>
+              <a:r>
+                <a:rPr lang="pt-BR" b="1" i="1" dirty="0">
+                  <a:solidFill>
+                    <a:schemeClr val="tx1">
+                      <a:lumMod val="50000"/>
+                      <a:lumOff val="50000"/>
+                    </a:schemeClr>
+                  </a:solidFill>
+                  <a:latin typeface="Nunito" pitchFamily="2" charset="77"/>
+                </a:rPr>
+                <a:t>outlier</a:t>
+              </a:r>
+            </a:p>
+          </p:txBody>
+        </p:sp>
+      </p:grpSp>
     </p:spTree>
     <p:extLst>
       <p:ext uri="{BB962C8B-B14F-4D97-AF65-F5344CB8AC3E}">

--- a/content/blog/outliers/Para_capa.pptx
+++ b/content/blog/outliers/Para_capa.pptx
@@ -3340,8 +3340,8 @@
         </p:nvSpPr>
         <p:spPr>
           <a:xfrm>
-            <a:off x="1024128" y="326136"/>
-            <a:ext cx="10143744" cy="6205728"/>
+            <a:off x="2621280" y="707134"/>
+            <a:ext cx="8095488" cy="5273761"/>
           </a:xfrm>
           <a:prstGeom prst="rect">
             <a:avLst/>
@@ -3378,205 +3378,185 @@
           </a:p>
         </p:txBody>
       </p:sp>
-      <p:grpSp>
-        <p:nvGrpSpPr>
-          <p:cNvPr id="3" name="Agrupar 2">
-            <a:extLst>
-              <a:ext uri="{FF2B5EF4-FFF2-40B4-BE49-F238E27FC236}">
-                <a16:creationId xmlns:a16="http://schemas.microsoft.com/office/drawing/2014/main" id="{E3E53212-5895-C293-7621-102890E0DC72}"/>
-              </a:ext>
-            </a:extLst>
-          </p:cNvPr>
-          <p:cNvGrpSpPr/>
+      <p:pic>
+        <p:nvPicPr>
+          <p:cNvPr id="5" name="Imagem 4">
+            <a:extLst>
+              <a:ext uri="{FF2B5EF4-FFF2-40B4-BE49-F238E27FC236}">
+                <a16:creationId xmlns:a16="http://schemas.microsoft.com/office/drawing/2014/main" id="{43E7EA07-A0B8-2CB4-6A15-30D4FE5E9FDD}"/>
+              </a:ext>
+            </a:extLst>
+          </p:cNvPr>
+          <p:cNvPicPr>
+            <a:picLocks noChangeAspect="1"/>
+          </p:cNvPicPr>
           <p:nvPr/>
-        </p:nvGrpSpPr>
-        <p:grpSpPr>
+        </p:nvPicPr>
+        <p:blipFill>
+          <a:blip r:embed="rId2"/>
+          <a:srcRect t="914" b="3979"/>
+          <a:stretch>
+            <a:fillRect/>
+          </a:stretch>
+        </p:blipFill>
+        <p:spPr>
           <a:xfrm>
-            <a:off x="3785526" y="656431"/>
-            <a:ext cx="4620948" cy="5545138"/>
-            <a:chOff x="3574366" y="656431"/>
-            <a:chExt cx="4620948" cy="5545138"/>
+            <a:off x="4358550" y="707135"/>
+            <a:ext cx="4620948" cy="5273761"/>
           </a:xfrm>
-        </p:grpSpPr>
-        <p:pic>
-          <p:nvPicPr>
-            <p:cNvPr id="5" name="Imagem 4">
-              <a:extLst>
-                <a:ext uri="{FF2B5EF4-FFF2-40B4-BE49-F238E27FC236}">
-                  <a16:creationId xmlns:a16="http://schemas.microsoft.com/office/drawing/2014/main" id="{43E7EA07-A0B8-2CB4-6A15-30D4FE5E9FDD}"/>
-                </a:ext>
-              </a:extLst>
-            </p:cNvPr>
-            <p:cNvPicPr>
-              <a:picLocks noChangeAspect="1"/>
-            </p:cNvPicPr>
-            <p:nvPr/>
-          </p:nvPicPr>
-          <p:blipFill>
-            <a:blip r:embed="rId2"/>
-            <a:stretch>
-              <a:fillRect/>
-            </a:stretch>
-          </p:blipFill>
-          <p:spPr>
-            <a:xfrm>
-              <a:off x="3574366" y="656431"/>
-              <a:ext cx="4620948" cy="5545138"/>
-            </a:xfrm>
-            <a:prstGeom prst="rect">
-              <a:avLst/>
-            </a:prstGeom>
-          </p:spPr>
-        </p:pic>
-        <p:sp>
-          <p:nvSpPr>
-            <p:cNvPr id="6" name="Forma Livre 5">
-              <a:extLst>
-                <a:ext uri="{FF2B5EF4-FFF2-40B4-BE49-F238E27FC236}">
-                  <a16:creationId xmlns:a16="http://schemas.microsoft.com/office/drawing/2014/main" id="{D2BA2287-5390-3392-6FDD-F524A7FA9A75}"/>
-                </a:ext>
-              </a:extLst>
-            </p:cNvPr>
-            <p:cNvSpPr/>
-            <p:nvPr/>
-          </p:nvSpPr>
-          <p:spPr>
-            <a:xfrm>
-              <a:off x="6414868" y="877103"/>
-              <a:ext cx="506437" cy="429407"/>
-            </a:xfrm>
-            <a:custGeom>
-              <a:avLst/>
-              <a:gdLst>
-                <a:gd name="csX0" fmla="*/ 0 w 506437"/>
-                <a:gd name="csY0" fmla="*/ 163906 h 429407"/>
-                <a:gd name="csX1" fmla="*/ 253218 w 506437"/>
-                <a:gd name="csY1" fmla="*/ 9162 h 429407"/>
-                <a:gd name="csX2" fmla="*/ 295421 w 506437"/>
-                <a:gd name="csY2" fmla="*/ 403057 h 429407"/>
-                <a:gd name="csX3" fmla="*/ 506437 w 506437"/>
-                <a:gd name="csY3" fmla="*/ 360854 h 429407"/>
-              </a:gdLst>
-              <a:ahLst/>
-              <a:cxnLst>
-                <a:cxn ang="0">
-                  <a:pos x="csX0" y="csY0"/>
-                </a:cxn>
-                <a:cxn ang="0">
-                  <a:pos x="csX1" y="csY1"/>
-                </a:cxn>
-                <a:cxn ang="0">
-                  <a:pos x="csX2" y="csY2"/>
-                </a:cxn>
-                <a:cxn ang="0">
-                  <a:pos x="csX3" y="csY3"/>
-                </a:cxn>
-              </a:cxnLst>
-              <a:rect l="l" t="t" r="r" b="b"/>
-              <a:pathLst>
-                <a:path w="506437" h="429407">
-                  <a:moveTo>
-                    <a:pt x="0" y="163906"/>
-                  </a:moveTo>
-                  <a:cubicBezTo>
-                    <a:pt x="101990" y="66604"/>
-                    <a:pt x="203981" y="-30697"/>
-                    <a:pt x="253218" y="9162"/>
-                  </a:cubicBezTo>
-                  <a:cubicBezTo>
-                    <a:pt x="302455" y="49020"/>
-                    <a:pt x="253218" y="344442"/>
-                    <a:pt x="295421" y="403057"/>
-                  </a:cubicBezTo>
-                  <a:cubicBezTo>
-                    <a:pt x="337624" y="461672"/>
-                    <a:pt x="422030" y="411263"/>
-                    <a:pt x="506437" y="360854"/>
-                  </a:cubicBezTo>
-                </a:path>
-              </a:pathLst>
-            </a:custGeom>
-            <a:noFill/>
-            <a:ln>
-              <a:solidFill>
-                <a:schemeClr val="tx1">
-                  <a:lumMod val="50000"/>
-                  <a:lumOff val="50000"/>
-                </a:schemeClr>
-              </a:solidFill>
-              <a:headEnd type="none" w="med" len="med"/>
-              <a:tailEnd type="triangle" w="med" len="med"/>
-            </a:ln>
-          </p:spPr>
-          <p:style>
-            <a:lnRef idx="2">
-              <a:schemeClr val="accent1">
-                <a:shade val="15000"/>
+          <a:prstGeom prst="rect">
+            <a:avLst/>
+          </a:prstGeom>
+        </p:spPr>
+      </p:pic>
+      <p:sp>
+        <p:nvSpPr>
+          <p:cNvPr id="6" name="Forma Livre 5">
+            <a:extLst>
+              <a:ext uri="{FF2B5EF4-FFF2-40B4-BE49-F238E27FC236}">
+                <a16:creationId xmlns:a16="http://schemas.microsoft.com/office/drawing/2014/main" id="{D2BA2287-5390-3392-6FDD-F524A7FA9A75}"/>
+              </a:ext>
+            </a:extLst>
+          </p:cNvPr>
+          <p:cNvSpPr/>
+          <p:nvPr/>
+        </p:nvSpPr>
+        <p:spPr>
+          <a:xfrm>
+            <a:off x="7199052" y="877103"/>
+            <a:ext cx="506437" cy="429407"/>
+          </a:xfrm>
+          <a:custGeom>
+            <a:avLst/>
+            <a:gdLst>
+              <a:gd name="csX0" fmla="*/ 0 w 506437"/>
+              <a:gd name="csY0" fmla="*/ 163906 h 429407"/>
+              <a:gd name="csX1" fmla="*/ 253218 w 506437"/>
+              <a:gd name="csY1" fmla="*/ 9162 h 429407"/>
+              <a:gd name="csX2" fmla="*/ 295421 w 506437"/>
+              <a:gd name="csY2" fmla="*/ 403057 h 429407"/>
+              <a:gd name="csX3" fmla="*/ 506437 w 506437"/>
+              <a:gd name="csY3" fmla="*/ 360854 h 429407"/>
+            </a:gdLst>
+            <a:ahLst/>
+            <a:cxnLst>
+              <a:cxn ang="0">
+                <a:pos x="csX0" y="csY0"/>
+              </a:cxn>
+              <a:cxn ang="0">
+                <a:pos x="csX1" y="csY1"/>
+              </a:cxn>
+              <a:cxn ang="0">
+                <a:pos x="csX2" y="csY2"/>
+              </a:cxn>
+              <a:cxn ang="0">
+                <a:pos x="csX3" y="csY3"/>
+              </a:cxn>
+            </a:cxnLst>
+            <a:rect l="l" t="t" r="r" b="b"/>
+            <a:pathLst>
+              <a:path w="506437" h="429407">
+                <a:moveTo>
+                  <a:pt x="0" y="163906"/>
+                </a:moveTo>
+                <a:cubicBezTo>
+                  <a:pt x="101990" y="66604"/>
+                  <a:pt x="203981" y="-30697"/>
+                  <a:pt x="253218" y="9162"/>
+                </a:cubicBezTo>
+                <a:cubicBezTo>
+                  <a:pt x="302455" y="49020"/>
+                  <a:pt x="253218" y="344442"/>
+                  <a:pt x="295421" y="403057"/>
+                </a:cubicBezTo>
+                <a:cubicBezTo>
+                  <a:pt x="337624" y="461672"/>
+                  <a:pt x="422030" y="411263"/>
+                  <a:pt x="506437" y="360854"/>
+                </a:cubicBezTo>
+              </a:path>
+            </a:pathLst>
+          </a:custGeom>
+          <a:noFill/>
+          <a:ln>
+            <a:solidFill>
+              <a:schemeClr val="tx1">
+                <a:lumMod val="50000"/>
+                <a:lumOff val="50000"/>
               </a:schemeClr>
-            </a:lnRef>
-            <a:fillRef idx="1">
-              <a:schemeClr val="accent1"/>
-            </a:fillRef>
-            <a:effectRef idx="0">
-              <a:schemeClr val="accent1"/>
-            </a:effectRef>
-            <a:fontRef idx="minor">
-              <a:schemeClr val="lt1"/>
-            </a:fontRef>
-          </p:style>
-          <p:txBody>
-            <a:bodyPr rtlCol="0" anchor="ctr"/>
-            <a:lstStyle/>
-            <a:p>
-              <a:pPr algn="ctr"/>
-              <a:endParaRPr lang="pt-BR"/>
-            </a:p>
-          </p:txBody>
-        </p:sp>
-        <p:sp>
-          <p:nvSpPr>
-            <p:cNvPr id="7" name="CaixaDeTexto 6">
-              <a:extLst>
-                <a:ext uri="{FF2B5EF4-FFF2-40B4-BE49-F238E27FC236}">
-                  <a16:creationId xmlns:a16="http://schemas.microsoft.com/office/drawing/2014/main" id="{EF4F0646-310E-DBD4-AC77-8B219E4BEC26}"/>
-                </a:ext>
-              </a:extLst>
-            </p:cNvPr>
-            <p:cNvSpPr txBox="1"/>
-            <p:nvPr/>
-          </p:nvSpPr>
-          <p:spPr>
-            <a:xfrm>
-              <a:off x="6893169" y="1091806"/>
-              <a:ext cx="864339" cy="369332"/>
-            </a:xfrm>
-            <a:prstGeom prst="rect">
-              <a:avLst/>
-            </a:prstGeom>
-            <a:noFill/>
-          </p:spPr>
-          <p:txBody>
-            <a:bodyPr wrap="none" rtlCol="0">
-              <a:spAutoFit/>
-            </a:bodyPr>
-            <a:lstStyle/>
-            <a:p>
-              <a:r>
-                <a:rPr lang="pt-BR" b="1" i="1" dirty="0">
-                  <a:solidFill>
-                    <a:schemeClr val="tx1">
-                      <a:lumMod val="50000"/>
-                      <a:lumOff val="50000"/>
-                    </a:schemeClr>
-                  </a:solidFill>
-                  <a:latin typeface="Nunito" pitchFamily="2" charset="77"/>
-                </a:rPr>
-                <a:t>outlier</a:t>
-              </a:r>
-            </a:p>
-          </p:txBody>
-        </p:sp>
-      </p:grpSp>
+            </a:solidFill>
+            <a:headEnd type="none" w="med" len="med"/>
+            <a:tailEnd type="triangle" w="med" len="med"/>
+          </a:ln>
+        </p:spPr>
+        <p:style>
+          <a:lnRef idx="2">
+            <a:schemeClr val="accent1">
+              <a:shade val="15000"/>
+            </a:schemeClr>
+          </a:lnRef>
+          <a:fillRef idx="1">
+            <a:schemeClr val="accent1"/>
+          </a:fillRef>
+          <a:effectRef idx="0">
+            <a:schemeClr val="accent1"/>
+          </a:effectRef>
+          <a:fontRef idx="minor">
+            <a:schemeClr val="lt1"/>
+          </a:fontRef>
+        </p:style>
+        <p:txBody>
+          <a:bodyPr rtlCol="0" anchor="ctr"/>
+          <a:lstStyle/>
+          <a:p>
+            <a:pPr algn="ctr"/>
+            <a:endParaRPr lang="pt-BR"/>
+          </a:p>
+        </p:txBody>
+      </p:sp>
+      <p:sp>
+        <p:nvSpPr>
+          <p:cNvPr id="7" name="CaixaDeTexto 6">
+            <a:extLst>
+              <a:ext uri="{FF2B5EF4-FFF2-40B4-BE49-F238E27FC236}">
+                <a16:creationId xmlns:a16="http://schemas.microsoft.com/office/drawing/2014/main" id="{EF4F0646-310E-DBD4-AC77-8B219E4BEC26}"/>
+              </a:ext>
+            </a:extLst>
+          </p:cNvPr>
+          <p:cNvSpPr txBox="1"/>
+          <p:nvPr/>
+        </p:nvSpPr>
+        <p:spPr>
+          <a:xfrm>
+            <a:off x="7677353" y="1091806"/>
+            <a:ext cx="864339" cy="369332"/>
+          </a:xfrm>
+          <a:prstGeom prst="rect">
+            <a:avLst/>
+          </a:prstGeom>
+          <a:noFill/>
+        </p:spPr>
+        <p:txBody>
+          <a:bodyPr wrap="none" rtlCol="0">
+            <a:spAutoFit/>
+          </a:bodyPr>
+          <a:lstStyle/>
+          <a:p>
+            <a:r>
+              <a:rPr lang="pt-BR" b="1" i="1" dirty="0">
+                <a:solidFill>
+                  <a:schemeClr val="tx1">
+                    <a:lumMod val="50000"/>
+                    <a:lumOff val="50000"/>
+                  </a:schemeClr>
+                </a:solidFill>
+                <a:latin typeface="Nunito" pitchFamily="2" charset="77"/>
+              </a:rPr>
+              <a:t>outlier</a:t>
+            </a:r>
+          </a:p>
+        </p:txBody>
+      </p:sp>
     </p:spTree>
     <p:extLst>
       <p:ext uri="{BB962C8B-B14F-4D97-AF65-F5344CB8AC3E}">
